--- a/卒業制作 テーマ・中間発表.pptx
+++ b/卒業制作 テーマ・中間発表.pptx
@@ -254,7 +254,7 @@
       <p15:sldGuideLst xmlns:p15="http://schemas.microsoft.com/office/powerpoint/2012/main"/>
     </p:ext>
     <p:ext uri="GoogleSlidesCustomDataVersion2">
-      <go:slidesCustomData xmlns="" xmlns:mc="http://schemas.openxmlformats.org/markup-compatibility/2006" xmlns:mv="urn:schemas-microsoft-com:mac:vml" xmlns:c="http://schemas.openxmlformats.org/drawingml/2006/chart" xmlns:dgm="http://schemas.openxmlformats.org/drawingml/2006/diagram" xmlns:o="urn:schemas-microsoft-com:office:office" xmlns:v="urn:schemas-microsoft-com:vml" xmlns:pvml="urn:schemas-microsoft-com:office:powerpoint" xmlns:com="http://schemas.openxmlformats.org/drawingml/2006/compatibility" xmlns:p14="http://schemas.microsoft.com/office/powerpoint/2010/main" xmlns:p15="http://schemas.microsoft.com/office/powerpoint/2012/main" xmlns:ahyp="http://schemas.microsoft.com/office/drawing/2018/hyperlinkcolor" xmlns:go="http://customooxmlschemas.google.com/" r:id="rId12" roundtripDataSignature="AMtx7mjQGFfbmcF/F6CMXnR89bWTo9kz7g=="/>
+      <go:slidesCustomData xmlns:go="http://customooxmlschemas.google.com/" xmlns:ahyp="http://schemas.microsoft.com/office/drawing/2018/hyperlinkcolor" xmlns:p15="http://schemas.microsoft.com/office/powerpoint/2012/main" xmlns:p14="http://schemas.microsoft.com/office/powerpoint/2010/main" xmlns:com="http://schemas.openxmlformats.org/drawingml/2006/compatibility" xmlns:pvml="urn:schemas-microsoft-com:office:powerpoint" xmlns:v="urn:schemas-microsoft-com:vml" xmlns:o="urn:schemas-microsoft-com:office:office" xmlns:dgm="http://schemas.openxmlformats.org/drawingml/2006/diagram" xmlns:c="http://schemas.openxmlformats.org/drawingml/2006/chart" xmlns:mv="urn:schemas-microsoft-com:mac:vml" xmlns:mc="http://schemas.openxmlformats.org/markup-compatibility/2006" xmlns="" r:id="rId12" roundtripDataSignature="AMtx7mjQGFfbmcF/F6CMXnR89bWTo9kz7g=="/>
     </p:ext>
   </p:extLst>
 </p:presentation>
@@ -1583,6 +1583,113 @@
 </file>
 
 <file path=ppt/notesSlides/notesSlide7.xml><?xml version="1.0" encoding="utf-8"?>
+<p:notes xmlns:a="http://schemas.openxmlformats.org/drawingml/2006/main" xmlns:r="http://schemas.openxmlformats.org/officeDocument/2006/relationships" xmlns:p="http://schemas.openxmlformats.org/presentationml/2006/main">
+  <p:cSld>
+    <p:spTree>
+      <p:nvGrpSpPr>
+        <p:cNvPr id="1" name=""/>
+        <p:cNvGrpSpPr/>
+        <p:nvPr/>
+      </p:nvGrpSpPr>
+      <p:grpSpPr>
+        <a:xfrm>
+          <a:off x="0" y="0"/>
+          <a:ext cx="0" cy="0"/>
+          <a:chOff x="0" y="0"/>
+          <a:chExt cx="0" cy="0"/>
+        </a:xfrm>
+      </p:grpSpPr>
+      <p:sp>
+        <p:nvSpPr>
+          <p:cNvPr id="2" name="スライド イメージ プレースホルダー 1"/>
+          <p:cNvSpPr>
+            <a:spLocks noGrp="1" noRot="1" noChangeAspect="1"/>
+          </p:cNvSpPr>
+          <p:nvPr>
+            <p:ph type="sldImg"/>
+          </p:nvPr>
+        </p:nvSpPr>
+        <p:spPr>
+          <a:xfrm>
+            <a:off x="381000" y="685800"/>
+            <a:ext cx="6096000" cy="3429000"/>
+          </a:xfrm>
+        </p:spPr>
+      </p:sp>
+      <p:sp>
+        <p:nvSpPr>
+          <p:cNvPr id="3" name="ノート プレースホルダー 2"/>
+          <p:cNvSpPr>
+            <a:spLocks noGrp="1"/>
+          </p:cNvSpPr>
+          <p:nvPr>
+            <p:ph type="body" idx="1"/>
+          </p:nvPr>
+        </p:nvSpPr>
+        <p:spPr/>
+        <p:txBody>
+          <a:bodyPr/>
+          <a:lstStyle/>
+          <a:p>
+            <a:pPr marL="158750" indent="0">
+              <a:buNone/>
+            </a:pPr>
+            <a:r>
+              <a:rPr lang="ja-JP" altLang="ja-JP" dirty="0"/>
+              <a:t>次に、現在の制作状況について説明します。</a:t>
+            </a:r>
+            <a:br>
+              <a:rPr lang="en-US" altLang="ja-JP" dirty="0"/>
+            </a:br>
+            <a:r>
+              <a:rPr lang="ja-JP" altLang="ja-JP" dirty="0"/>
+              <a:t>まず、Webサイトについてです。現在、TOPページ、豆田町について、観光スポットのページを制作しています。</a:t>
+            </a:r>
+            <a:endParaRPr lang="en-US" altLang="ja-JP" dirty="0"/>
+          </a:p>
+          <a:p>
+            <a:pPr marL="158750" indent="0">
+              <a:buNone/>
+            </a:pPr>
+            <a:r>
+              <a:rPr lang="ja-JP" altLang="ja-JP" dirty="0"/>
+              <a:t>グルメ・お店とアクセスのページは現在制作中で、その他にも各ページのレイアウトの調整や修正、不足している写真の補充や写真の修正を進めています。</a:t>
+            </a:r>
+          </a:p>
+          <a:p>
+            <a:pPr marL="158750" indent="0">
+              <a:buNone/>
+            </a:pPr>
+            <a:r>
+              <a:rPr lang="ja-JP" altLang="ja-JP" dirty="0"/>
+              <a:t>次に、3Dマップについてです。</a:t>
+            </a:r>
+          </a:p>
+          <a:p>
+            <a:pPr marL="158750" indent="0">
+              <a:buNone/>
+            </a:pPr>
+            <a:r>
+              <a:rPr lang="ja-JP" altLang="ja-JP" dirty="0"/>
+              <a:t>Webサイトへの組み込みと、3Dマップの基本的な操作は制作済みです。現在は、建物や道路の配置を調整しており、Blenderで建物の3Dモデルも制作しています。</a:t>
+            </a:r>
+          </a:p>
+        </p:txBody>
+      </p:sp>
+    </p:spTree>
+    <p:extLst>
+      <p:ext uri="{BB962C8B-B14F-4D97-AF65-F5344CB8AC3E}">
+        <p14:creationId xmlns:p14="http://schemas.microsoft.com/office/powerpoint/2010/main" val="4284769416"/>
+      </p:ext>
+    </p:extLst>
+  </p:cSld>
+  <p:clrMapOvr>
+    <a:masterClrMapping/>
+  </p:clrMapOvr>
+</p:notes>
+</file>
+
+<file path=ppt/notesSlides/notesSlide8.xml><?xml version="1.0" encoding="utf-8"?>
 <p:notes xmlns:a="http://schemas.openxmlformats.org/drawingml/2006/main" xmlns:r="http://schemas.openxmlformats.org/officeDocument/2006/relationships" xmlns:p="http://schemas.openxmlformats.org/presentationml/2006/main" showMasterSp="0" showMasterPhAnim="0">
   <p:cSld>
     <p:spTree>
@@ -1715,7 +1822,7 @@
 </p:notes>
 </file>
 
-<file path=ppt/notesSlides/notesSlide8.xml><?xml version="1.0" encoding="utf-8"?>
+<file path=ppt/notesSlides/notesSlide9.xml><?xml version="1.0" encoding="utf-8"?>
 <p:notes xmlns:a="http://schemas.openxmlformats.org/drawingml/2006/main" xmlns:r="http://schemas.openxmlformats.org/officeDocument/2006/relationships" xmlns:p="http://schemas.openxmlformats.org/presentationml/2006/main" showMasterSp="0" showMasterPhAnim="0">
   <p:cSld>
     <p:spTree>
@@ -15197,33 +15304,16 @@
           </a:bodyPr>
           <a:lstStyle/>
           <a:p>
-            <a:pPr marL="0" lvl="0" indent="0" algn="ctr" rtl="0">
-              <a:lnSpc>
-                <a:spcPct val="90000"/>
-              </a:lnSpc>
-              <a:spcBef>
-                <a:spcPts val="0"/>
-              </a:spcBef>
-              <a:spcAft>
-                <a:spcPts val="0"/>
-              </a:spcAft>
-              <a:buClr>
-                <a:schemeClr val="dk1"/>
-              </a:buClr>
-              <a:buSzPts val="6000"/>
-              <a:buFont typeface="Arial"/>
-              <a:buNone/>
-            </a:pPr>
             <a:r>
-              <a:rPr lang="ja-JP" dirty="0"/>
-              <a:t>卒業制作</a:t>
+              <a:rPr lang="ja-JP" altLang="ja-JP" dirty="0"/>
+              <a:t>予備審査</a:t>
             </a:r>
             <a:br>
-              <a:rPr lang="ja-JP" dirty="0"/>
+              <a:rPr lang="ja-JP" altLang="ja-JP" dirty="0"/>
             </a:br>
             <a:r>
-              <a:rPr lang="ja-JP" dirty="0"/>
-              <a:t>テーマ・中間発表</a:t>
+              <a:rPr lang="ja-JP" altLang="ja-JP" dirty="0"/>
+              <a:t>発表</a:t>
             </a:r>
             <a:endParaRPr dirty="0"/>
           </a:p>
@@ -16702,6 +16792,1015 @@
           <a:chExt cx="0" cy="0"/>
         </a:xfrm>
       </p:grpSpPr>
+      <p:sp>
+        <p:nvSpPr>
+          <p:cNvPr id="4" name="Google Shape;108;g15565c702ff_2_0">
+            <a:extLst>
+              <a:ext uri="{FF2B5EF4-FFF2-40B4-BE49-F238E27FC236}">
+                <a16:creationId xmlns:a16="http://schemas.microsoft.com/office/drawing/2014/main" id="{85CCF1D9-0CC7-C910-7BB8-EE38E74F5A2E}"/>
+              </a:ext>
+            </a:extLst>
+          </p:cNvPr>
+          <p:cNvSpPr txBox="1">
+            <a:spLocks/>
+          </p:cNvSpPr>
+          <p:nvPr/>
+        </p:nvSpPr>
+        <p:spPr>
+          <a:xfrm>
+            <a:off x="838200" y="365125"/>
+            <a:ext cx="10515600" cy="1325700"/>
+          </a:xfrm>
+          <a:prstGeom prst="rect">
+            <a:avLst/>
+          </a:prstGeom>
+          <a:noFill/>
+          <a:ln>
+            <a:noFill/>
+          </a:ln>
+        </p:spPr>
+        <p:txBody>
+          <a:bodyPr spcFirstLastPara="1" wrap="square" lIns="91425" tIns="45700" rIns="91425" bIns="45700" anchor="ctr" anchorCtr="0">
+            <a:normAutofit/>
+          </a:bodyPr>
+          <a:lstStyle>
+            <a:defPPr marR="0" lvl="0" algn="l" rtl="0">
+              <a:lnSpc>
+                <a:spcPct val="100000"/>
+              </a:lnSpc>
+              <a:spcBef>
+                <a:spcPts val="0"/>
+              </a:spcBef>
+              <a:spcAft>
+                <a:spcPts val="0"/>
+              </a:spcAft>
+            </a:defPPr>
+            <a:lvl1pPr marR="0" lvl="0" algn="l" rtl="0">
+              <a:lnSpc>
+                <a:spcPct val="100000"/>
+              </a:lnSpc>
+              <a:spcBef>
+                <a:spcPts val="0"/>
+              </a:spcBef>
+              <a:spcAft>
+                <a:spcPts val="0"/>
+              </a:spcAft>
+              <a:buClr>
+                <a:srgbClr val="000000"/>
+              </a:buClr>
+              <a:buFont typeface="Arial"/>
+              <a:defRPr sz="1400" b="0" i="0" u="none" strike="noStrike" cap="none" spc="0">
+                <a:solidFill>
+                  <a:srgbClr val="000000"/>
+                </a:solidFill>
+                <a:latin typeface="Arial"/>
+                <a:ea typeface="Arial"/>
+                <a:cs typeface="Arial"/>
+                <a:sym typeface="Arial"/>
+              </a:defRPr>
+            </a:lvl1pPr>
+            <a:lvl2pPr marR="0" lvl="1" algn="l" rtl="0">
+              <a:lnSpc>
+                <a:spcPct val="100000"/>
+              </a:lnSpc>
+              <a:spcBef>
+                <a:spcPts val="0"/>
+              </a:spcBef>
+              <a:spcAft>
+                <a:spcPts val="0"/>
+              </a:spcAft>
+              <a:buClr>
+                <a:srgbClr val="000000"/>
+              </a:buClr>
+              <a:buFont typeface="Arial"/>
+              <a:defRPr sz="1400" b="0" i="0" u="none" strike="noStrike" cap="none" spc="0">
+                <a:solidFill>
+                  <a:srgbClr val="000000"/>
+                </a:solidFill>
+                <a:latin typeface="Arial"/>
+                <a:ea typeface="Arial"/>
+                <a:cs typeface="Arial"/>
+                <a:sym typeface="Arial"/>
+              </a:defRPr>
+            </a:lvl2pPr>
+            <a:lvl3pPr marR="0" lvl="2" algn="l" rtl="0">
+              <a:lnSpc>
+                <a:spcPct val="100000"/>
+              </a:lnSpc>
+              <a:spcBef>
+                <a:spcPts val="0"/>
+              </a:spcBef>
+              <a:spcAft>
+                <a:spcPts val="0"/>
+              </a:spcAft>
+              <a:buClr>
+                <a:srgbClr val="000000"/>
+              </a:buClr>
+              <a:buFont typeface="Arial"/>
+              <a:defRPr sz="1400" b="0" i="0" u="none" strike="noStrike" cap="none" spc="0">
+                <a:solidFill>
+                  <a:srgbClr val="000000"/>
+                </a:solidFill>
+                <a:latin typeface="Arial"/>
+                <a:ea typeface="Arial"/>
+                <a:cs typeface="Arial"/>
+                <a:sym typeface="Arial"/>
+              </a:defRPr>
+            </a:lvl3pPr>
+            <a:lvl4pPr marR="0" lvl="3" algn="l" rtl="0">
+              <a:lnSpc>
+                <a:spcPct val="100000"/>
+              </a:lnSpc>
+              <a:spcBef>
+                <a:spcPts val="0"/>
+              </a:spcBef>
+              <a:spcAft>
+                <a:spcPts val="0"/>
+              </a:spcAft>
+              <a:buClr>
+                <a:srgbClr val="000000"/>
+              </a:buClr>
+              <a:buFont typeface="Arial"/>
+              <a:defRPr sz="1400" b="0" i="0" u="none" strike="noStrike" cap="none" spc="0">
+                <a:solidFill>
+                  <a:srgbClr val="000000"/>
+                </a:solidFill>
+                <a:latin typeface="Arial"/>
+                <a:ea typeface="Arial"/>
+                <a:cs typeface="Arial"/>
+                <a:sym typeface="Arial"/>
+              </a:defRPr>
+            </a:lvl4pPr>
+            <a:lvl5pPr marR="0" lvl="4" algn="l" rtl="0">
+              <a:lnSpc>
+                <a:spcPct val="100000"/>
+              </a:lnSpc>
+              <a:spcBef>
+                <a:spcPts val="0"/>
+              </a:spcBef>
+              <a:spcAft>
+                <a:spcPts val="0"/>
+              </a:spcAft>
+              <a:buClr>
+                <a:srgbClr val="000000"/>
+              </a:buClr>
+              <a:buFont typeface="Arial"/>
+              <a:defRPr sz="1400" b="0" i="0" u="none" strike="noStrike" cap="none" spc="0">
+                <a:solidFill>
+                  <a:srgbClr val="000000"/>
+                </a:solidFill>
+                <a:latin typeface="Arial"/>
+                <a:ea typeface="Arial"/>
+                <a:cs typeface="Arial"/>
+                <a:sym typeface="Arial"/>
+              </a:defRPr>
+            </a:lvl5pPr>
+            <a:lvl6pPr marR="0" lvl="5" algn="l" rtl="0">
+              <a:lnSpc>
+                <a:spcPct val="100000"/>
+              </a:lnSpc>
+              <a:spcBef>
+                <a:spcPts val="0"/>
+              </a:spcBef>
+              <a:spcAft>
+                <a:spcPts val="0"/>
+              </a:spcAft>
+              <a:buClr>
+                <a:srgbClr val="000000"/>
+              </a:buClr>
+              <a:buFont typeface="Arial"/>
+              <a:defRPr sz="1400" b="0" i="0" u="none" strike="noStrike" cap="none" spc="0">
+                <a:solidFill>
+                  <a:srgbClr val="000000"/>
+                </a:solidFill>
+                <a:latin typeface="Arial"/>
+                <a:ea typeface="Arial"/>
+                <a:cs typeface="Arial"/>
+                <a:sym typeface="Arial"/>
+              </a:defRPr>
+            </a:lvl6pPr>
+            <a:lvl7pPr marR="0" lvl="6" algn="l" rtl="0">
+              <a:lnSpc>
+                <a:spcPct val="100000"/>
+              </a:lnSpc>
+              <a:spcBef>
+                <a:spcPts val="0"/>
+              </a:spcBef>
+              <a:spcAft>
+                <a:spcPts val="0"/>
+              </a:spcAft>
+              <a:buClr>
+                <a:srgbClr val="000000"/>
+              </a:buClr>
+              <a:buFont typeface="Arial"/>
+              <a:defRPr sz="1400" b="0" i="0" u="none" strike="noStrike" cap="none" spc="0">
+                <a:solidFill>
+                  <a:srgbClr val="000000"/>
+                </a:solidFill>
+                <a:latin typeface="Arial"/>
+                <a:ea typeface="Arial"/>
+                <a:cs typeface="Arial"/>
+                <a:sym typeface="Arial"/>
+              </a:defRPr>
+            </a:lvl7pPr>
+            <a:lvl8pPr marR="0" lvl="7" algn="l" rtl="0">
+              <a:lnSpc>
+                <a:spcPct val="100000"/>
+              </a:lnSpc>
+              <a:spcBef>
+                <a:spcPts val="0"/>
+              </a:spcBef>
+              <a:spcAft>
+                <a:spcPts val="0"/>
+              </a:spcAft>
+              <a:buClr>
+                <a:srgbClr val="000000"/>
+              </a:buClr>
+              <a:buFont typeface="Arial"/>
+              <a:defRPr sz="1400" b="0" i="0" u="none" strike="noStrike" cap="none" spc="0">
+                <a:solidFill>
+                  <a:srgbClr val="000000"/>
+                </a:solidFill>
+                <a:latin typeface="Arial"/>
+                <a:ea typeface="Arial"/>
+                <a:cs typeface="Arial"/>
+                <a:sym typeface="Arial"/>
+              </a:defRPr>
+            </a:lvl8pPr>
+            <a:lvl9pPr marR="0" lvl="8" algn="l" rtl="0">
+              <a:lnSpc>
+                <a:spcPct val="100000"/>
+              </a:lnSpc>
+              <a:spcBef>
+                <a:spcPts val="0"/>
+              </a:spcBef>
+              <a:spcAft>
+                <a:spcPts val="0"/>
+              </a:spcAft>
+              <a:buClr>
+                <a:srgbClr val="000000"/>
+              </a:buClr>
+              <a:buFont typeface="Arial"/>
+              <a:defRPr sz="1400" b="0" i="0" u="none" strike="noStrike" cap="none" spc="0">
+                <a:solidFill>
+                  <a:srgbClr val="000000"/>
+                </a:solidFill>
+                <a:latin typeface="Arial"/>
+                <a:ea typeface="Arial"/>
+                <a:cs typeface="Arial"/>
+                <a:sym typeface="Arial"/>
+              </a:defRPr>
+            </a:lvl9pPr>
+          </a:lstStyle>
+          <a:p>
+            <a:pPr>
+              <a:lnSpc>
+                <a:spcPct val="90000"/>
+              </a:lnSpc>
+              <a:buClr>
+                <a:schemeClr val="dk1"/>
+              </a:buClr>
+              <a:buSzPts val="4400"/>
+            </a:pPr>
+            <a:r>
+              <a:rPr lang="ja-JP" altLang="en-US" sz="4400" dirty="0"/>
+              <a:t>現在の状況</a:t>
+            </a:r>
+            <a:endParaRPr lang="en-US" altLang="ja-JP" sz="4400" dirty="0"/>
+          </a:p>
+        </p:txBody>
+      </p:sp>
+      <p:sp>
+        <p:nvSpPr>
+          <p:cNvPr id="5" name="Google Shape;109;g15565c702ff_2_0">
+            <a:extLst>
+              <a:ext uri="{FF2B5EF4-FFF2-40B4-BE49-F238E27FC236}">
+                <a16:creationId xmlns:a16="http://schemas.microsoft.com/office/drawing/2014/main" id="{8BB6C46C-CD7C-CB2B-9B94-D01F1EC8984B}"/>
+              </a:ext>
+            </a:extLst>
+          </p:cNvPr>
+          <p:cNvSpPr txBox="1">
+            <a:spLocks/>
+          </p:cNvSpPr>
+          <p:nvPr/>
+        </p:nvSpPr>
+        <p:spPr>
+          <a:xfrm>
+            <a:off x="838200" y="1825625"/>
+            <a:ext cx="5588000" cy="4498975"/>
+          </a:xfrm>
+          <a:prstGeom prst="rect">
+            <a:avLst/>
+          </a:prstGeom>
+          <a:noFill/>
+          <a:ln>
+            <a:noFill/>
+          </a:ln>
+        </p:spPr>
+        <p:txBody>
+          <a:bodyPr spcFirstLastPara="1" wrap="square" lIns="91425" tIns="45700" rIns="91425" bIns="45700" anchor="t" anchorCtr="0">
+            <a:noAutofit/>
+          </a:bodyPr>
+          <a:lstStyle>
+            <a:defPPr marR="0" lvl="0" algn="l" rtl="0">
+              <a:lnSpc>
+                <a:spcPct val="100000"/>
+              </a:lnSpc>
+              <a:spcBef>
+                <a:spcPts val="0"/>
+              </a:spcBef>
+              <a:spcAft>
+                <a:spcPts val="0"/>
+              </a:spcAft>
+            </a:defPPr>
+            <a:lvl1pPr marR="0" lvl="0" algn="l" rtl="0">
+              <a:lnSpc>
+                <a:spcPct val="100000"/>
+              </a:lnSpc>
+              <a:spcBef>
+                <a:spcPts val="0"/>
+              </a:spcBef>
+              <a:spcAft>
+                <a:spcPts val="0"/>
+              </a:spcAft>
+              <a:buClr>
+                <a:srgbClr val="000000"/>
+              </a:buClr>
+              <a:buFont typeface="Arial"/>
+              <a:defRPr sz="1400" b="0" i="0" u="none" strike="noStrike" cap="none" spc="0">
+                <a:solidFill>
+                  <a:srgbClr val="000000"/>
+                </a:solidFill>
+                <a:latin typeface="Arial"/>
+                <a:ea typeface="Arial"/>
+                <a:cs typeface="Arial"/>
+                <a:sym typeface="Arial"/>
+              </a:defRPr>
+            </a:lvl1pPr>
+            <a:lvl2pPr marR="0" lvl="1" algn="l" rtl="0">
+              <a:lnSpc>
+                <a:spcPct val="100000"/>
+              </a:lnSpc>
+              <a:spcBef>
+                <a:spcPts val="0"/>
+              </a:spcBef>
+              <a:spcAft>
+                <a:spcPts val="0"/>
+              </a:spcAft>
+              <a:buClr>
+                <a:srgbClr val="000000"/>
+              </a:buClr>
+              <a:buFont typeface="Arial"/>
+              <a:defRPr sz="1400" b="0" i="0" u="none" strike="noStrike" cap="none" spc="0">
+                <a:solidFill>
+                  <a:srgbClr val="000000"/>
+                </a:solidFill>
+                <a:latin typeface="Arial"/>
+                <a:ea typeface="Arial"/>
+                <a:cs typeface="Arial"/>
+                <a:sym typeface="Arial"/>
+              </a:defRPr>
+            </a:lvl2pPr>
+            <a:lvl3pPr marR="0" lvl="2" algn="l" rtl="0">
+              <a:lnSpc>
+                <a:spcPct val="100000"/>
+              </a:lnSpc>
+              <a:spcBef>
+                <a:spcPts val="0"/>
+              </a:spcBef>
+              <a:spcAft>
+                <a:spcPts val="0"/>
+              </a:spcAft>
+              <a:buClr>
+                <a:srgbClr val="000000"/>
+              </a:buClr>
+              <a:buFont typeface="Arial"/>
+              <a:defRPr sz="1400" b="0" i="0" u="none" strike="noStrike" cap="none" spc="0">
+                <a:solidFill>
+                  <a:srgbClr val="000000"/>
+                </a:solidFill>
+                <a:latin typeface="Arial"/>
+                <a:ea typeface="Arial"/>
+                <a:cs typeface="Arial"/>
+                <a:sym typeface="Arial"/>
+              </a:defRPr>
+            </a:lvl3pPr>
+            <a:lvl4pPr marR="0" lvl="3" algn="l" rtl="0">
+              <a:lnSpc>
+                <a:spcPct val="100000"/>
+              </a:lnSpc>
+              <a:spcBef>
+                <a:spcPts val="0"/>
+              </a:spcBef>
+              <a:spcAft>
+                <a:spcPts val="0"/>
+              </a:spcAft>
+              <a:buClr>
+                <a:srgbClr val="000000"/>
+              </a:buClr>
+              <a:buFont typeface="Arial"/>
+              <a:defRPr sz="1400" b="0" i="0" u="none" strike="noStrike" cap="none" spc="0">
+                <a:solidFill>
+                  <a:srgbClr val="000000"/>
+                </a:solidFill>
+                <a:latin typeface="Arial"/>
+                <a:ea typeface="Arial"/>
+                <a:cs typeface="Arial"/>
+                <a:sym typeface="Arial"/>
+              </a:defRPr>
+            </a:lvl4pPr>
+            <a:lvl5pPr marR="0" lvl="4" algn="l" rtl="0">
+              <a:lnSpc>
+                <a:spcPct val="100000"/>
+              </a:lnSpc>
+              <a:spcBef>
+                <a:spcPts val="0"/>
+              </a:spcBef>
+              <a:spcAft>
+                <a:spcPts val="0"/>
+              </a:spcAft>
+              <a:buClr>
+                <a:srgbClr val="000000"/>
+              </a:buClr>
+              <a:buFont typeface="Arial"/>
+              <a:defRPr sz="1400" b="0" i="0" u="none" strike="noStrike" cap="none" spc="0">
+                <a:solidFill>
+                  <a:srgbClr val="000000"/>
+                </a:solidFill>
+                <a:latin typeface="Arial"/>
+                <a:ea typeface="Arial"/>
+                <a:cs typeface="Arial"/>
+                <a:sym typeface="Arial"/>
+              </a:defRPr>
+            </a:lvl5pPr>
+            <a:lvl6pPr marR="0" lvl="5" algn="l" rtl="0">
+              <a:lnSpc>
+                <a:spcPct val="100000"/>
+              </a:lnSpc>
+              <a:spcBef>
+                <a:spcPts val="0"/>
+              </a:spcBef>
+              <a:spcAft>
+                <a:spcPts val="0"/>
+              </a:spcAft>
+              <a:buClr>
+                <a:srgbClr val="000000"/>
+              </a:buClr>
+              <a:buFont typeface="Arial"/>
+              <a:defRPr sz="1400" b="0" i="0" u="none" strike="noStrike" cap="none" spc="0">
+                <a:solidFill>
+                  <a:srgbClr val="000000"/>
+                </a:solidFill>
+                <a:latin typeface="Arial"/>
+                <a:ea typeface="Arial"/>
+                <a:cs typeface="Arial"/>
+                <a:sym typeface="Arial"/>
+              </a:defRPr>
+            </a:lvl6pPr>
+            <a:lvl7pPr marR="0" lvl="6" algn="l" rtl="0">
+              <a:lnSpc>
+                <a:spcPct val="100000"/>
+              </a:lnSpc>
+              <a:spcBef>
+                <a:spcPts val="0"/>
+              </a:spcBef>
+              <a:spcAft>
+                <a:spcPts val="0"/>
+              </a:spcAft>
+              <a:buClr>
+                <a:srgbClr val="000000"/>
+              </a:buClr>
+              <a:buFont typeface="Arial"/>
+              <a:defRPr sz="1400" b="0" i="0" u="none" strike="noStrike" cap="none" spc="0">
+                <a:solidFill>
+                  <a:srgbClr val="000000"/>
+                </a:solidFill>
+                <a:latin typeface="Arial"/>
+                <a:ea typeface="Arial"/>
+                <a:cs typeface="Arial"/>
+                <a:sym typeface="Arial"/>
+              </a:defRPr>
+            </a:lvl7pPr>
+            <a:lvl8pPr marR="0" lvl="7" algn="l" rtl="0">
+              <a:lnSpc>
+                <a:spcPct val="100000"/>
+              </a:lnSpc>
+              <a:spcBef>
+                <a:spcPts val="0"/>
+              </a:spcBef>
+              <a:spcAft>
+                <a:spcPts val="0"/>
+              </a:spcAft>
+              <a:buClr>
+                <a:srgbClr val="000000"/>
+              </a:buClr>
+              <a:buFont typeface="Arial"/>
+              <a:defRPr sz="1400" b="0" i="0" u="none" strike="noStrike" cap="none" spc="0">
+                <a:solidFill>
+                  <a:srgbClr val="000000"/>
+                </a:solidFill>
+                <a:latin typeface="Arial"/>
+                <a:ea typeface="Arial"/>
+                <a:cs typeface="Arial"/>
+                <a:sym typeface="Arial"/>
+              </a:defRPr>
+            </a:lvl8pPr>
+            <a:lvl9pPr marR="0" lvl="8" algn="l" rtl="0">
+              <a:lnSpc>
+                <a:spcPct val="100000"/>
+              </a:lnSpc>
+              <a:spcBef>
+                <a:spcPts val="0"/>
+              </a:spcBef>
+              <a:spcAft>
+                <a:spcPts val="0"/>
+              </a:spcAft>
+              <a:buClr>
+                <a:srgbClr val="000000"/>
+              </a:buClr>
+              <a:buFont typeface="Arial"/>
+              <a:defRPr sz="1400" b="0" i="0" u="none" strike="noStrike" cap="none" spc="0">
+                <a:solidFill>
+                  <a:srgbClr val="000000"/>
+                </a:solidFill>
+                <a:latin typeface="Arial"/>
+                <a:ea typeface="Arial"/>
+                <a:cs typeface="Arial"/>
+                <a:sym typeface="Arial"/>
+              </a:defRPr>
+            </a:lvl9pPr>
+          </a:lstStyle>
+          <a:p>
+            <a:r>
+              <a:rPr lang="ja-JP" altLang="ja-JP" sz="2600" b="1" dirty="0"/>
+              <a:t>① Webサイト</a:t>
+            </a:r>
+          </a:p>
+          <a:p>
+            <a:r>
+              <a:rPr lang="ja-JP" altLang="ja-JP" sz="2600" b="1" dirty="0"/>
+              <a:t>制作済み</a:t>
+            </a:r>
+            <a:endParaRPr lang="ja-JP" altLang="ja-JP" sz="2600" dirty="0"/>
+          </a:p>
+          <a:p>
+            <a:pPr lvl="0"/>
+            <a:r>
+              <a:rPr lang="ja-JP" altLang="ja-JP" sz="2600" dirty="0"/>
+              <a:t>TOPページ </a:t>
+            </a:r>
+            <a:r>
+              <a:rPr lang="ja-JP" altLang="en-US" sz="2600" dirty="0"/>
+              <a:t>、</a:t>
+            </a:r>
+            <a:r>
+              <a:rPr lang="ja-JP" altLang="ja-JP" sz="2600" dirty="0"/>
+              <a:t>豆田町について </a:t>
+            </a:r>
+          </a:p>
+          <a:p>
+            <a:pPr lvl="0"/>
+            <a:r>
+              <a:rPr lang="ja-JP" altLang="ja-JP" sz="2600" dirty="0"/>
+              <a:t>観光スポット </a:t>
+            </a:r>
+            <a:endParaRPr lang="en-US" altLang="ja-JP" sz="2600" dirty="0"/>
+          </a:p>
+          <a:p>
+            <a:pPr lvl="0"/>
+            <a:endParaRPr lang="ja-JP" altLang="ja-JP" sz="2600" dirty="0"/>
+          </a:p>
+          <a:p>
+            <a:r>
+              <a:rPr lang="ja-JP" altLang="ja-JP" sz="2600" b="1" dirty="0"/>
+              <a:t>制作中・調整</a:t>
+            </a:r>
+            <a:endParaRPr lang="ja-JP" altLang="ja-JP" sz="2600" dirty="0"/>
+          </a:p>
+          <a:p>
+            <a:pPr lvl="0"/>
+            <a:r>
+              <a:rPr lang="ja-JP" altLang="ja-JP" sz="2600" dirty="0"/>
+              <a:t>グルメ・お店ページ </a:t>
+            </a:r>
+            <a:endParaRPr lang="en-US" altLang="ja-JP" sz="2600" dirty="0"/>
+          </a:p>
+          <a:p>
+            <a:pPr lvl="0"/>
+            <a:r>
+              <a:rPr lang="ja-JP" altLang="ja-JP" sz="2600" dirty="0"/>
+              <a:t>アクセスページ </a:t>
+            </a:r>
+          </a:p>
+          <a:p>
+            <a:pPr lvl="0"/>
+            <a:r>
+              <a:rPr lang="ja-JP" altLang="ja-JP" sz="2600" dirty="0"/>
+              <a:t>各ページのレイアウト調整・修正 </a:t>
+            </a:r>
+          </a:p>
+          <a:p>
+            <a:pPr lvl="0"/>
+            <a:r>
+              <a:rPr lang="ja-JP" altLang="ja-JP" sz="2600" dirty="0"/>
+              <a:t>不足している写真の補充・修正 </a:t>
+            </a:r>
+          </a:p>
+          <a:p>
+            <a:r>
+              <a:rPr lang="ja-JP" altLang="ja-JP" sz="2600" b="1" dirty="0"/>
+              <a:t>▶ </a:t>
+            </a:r>
+            <a:r>
+              <a:rPr lang="ja-JP" altLang="ja-JP" sz="2600" b="1" dirty="0">
+                <a:hlinkClick r:id="rId3"/>
+              </a:rPr>
+              <a:t>Webサイト</a:t>
+            </a:r>
+            <a:r>
+              <a:rPr lang="ja-JP" altLang="en-US" sz="2600" b="1" dirty="0">
+                <a:hlinkClick r:id="rId3"/>
+              </a:rPr>
+              <a:t>を</a:t>
+            </a:r>
+            <a:r>
+              <a:rPr lang="ja-JP" altLang="ja-JP" sz="2600" b="1" dirty="0">
+                <a:hlinkClick r:id="rId3"/>
+              </a:rPr>
+              <a:t>確認</a:t>
+            </a:r>
+            <a:endParaRPr lang="ja-JP" altLang="ja-JP" sz="2600" dirty="0"/>
+          </a:p>
+        </p:txBody>
+      </p:sp>
+      <p:sp>
+        <p:nvSpPr>
+          <p:cNvPr id="7" name="Google Shape;109;g15565c702ff_2_0">
+            <a:extLst>
+              <a:ext uri="{FF2B5EF4-FFF2-40B4-BE49-F238E27FC236}">
+                <a16:creationId xmlns:a16="http://schemas.microsoft.com/office/drawing/2014/main" id="{7EB0C2B3-CBA7-8BA6-B86D-A091739A59A4}"/>
+              </a:ext>
+            </a:extLst>
+          </p:cNvPr>
+          <p:cNvSpPr txBox="1">
+            <a:spLocks/>
+          </p:cNvSpPr>
+          <p:nvPr/>
+        </p:nvSpPr>
+        <p:spPr>
+          <a:xfrm>
+            <a:off x="6680200" y="1825625"/>
+            <a:ext cx="5012267" cy="4351200"/>
+          </a:xfrm>
+          <a:prstGeom prst="rect">
+            <a:avLst/>
+          </a:prstGeom>
+          <a:noFill/>
+          <a:ln>
+            <a:noFill/>
+          </a:ln>
+        </p:spPr>
+        <p:txBody>
+          <a:bodyPr spcFirstLastPara="1" wrap="square" lIns="91425" tIns="45700" rIns="91425" bIns="45700" anchor="t" anchorCtr="0">
+            <a:normAutofit fontScale="92500" lnSpcReduction="20000"/>
+          </a:bodyPr>
+          <a:lstStyle>
+            <a:defPPr marR="0" lvl="0" algn="l" rtl="0">
+              <a:lnSpc>
+                <a:spcPct val="100000"/>
+              </a:lnSpc>
+              <a:spcBef>
+                <a:spcPts val="0"/>
+              </a:spcBef>
+              <a:spcAft>
+                <a:spcPts val="0"/>
+              </a:spcAft>
+            </a:defPPr>
+            <a:lvl1pPr marR="0" lvl="0" algn="l" rtl="0">
+              <a:lnSpc>
+                <a:spcPct val="100000"/>
+              </a:lnSpc>
+              <a:spcBef>
+                <a:spcPts val="0"/>
+              </a:spcBef>
+              <a:spcAft>
+                <a:spcPts val="0"/>
+              </a:spcAft>
+              <a:buClr>
+                <a:srgbClr val="000000"/>
+              </a:buClr>
+              <a:buFont typeface="Arial"/>
+              <a:defRPr sz="1400" b="0" i="0" u="none" strike="noStrike" cap="none" spc="0">
+                <a:solidFill>
+                  <a:srgbClr val="000000"/>
+                </a:solidFill>
+                <a:latin typeface="Arial"/>
+                <a:ea typeface="Arial"/>
+                <a:cs typeface="Arial"/>
+                <a:sym typeface="Arial"/>
+              </a:defRPr>
+            </a:lvl1pPr>
+            <a:lvl2pPr marR="0" lvl="1" algn="l" rtl="0">
+              <a:lnSpc>
+                <a:spcPct val="100000"/>
+              </a:lnSpc>
+              <a:spcBef>
+                <a:spcPts val="0"/>
+              </a:spcBef>
+              <a:spcAft>
+                <a:spcPts val="0"/>
+              </a:spcAft>
+              <a:buClr>
+                <a:srgbClr val="000000"/>
+              </a:buClr>
+              <a:buFont typeface="Arial"/>
+              <a:defRPr sz="1400" b="0" i="0" u="none" strike="noStrike" cap="none" spc="0">
+                <a:solidFill>
+                  <a:srgbClr val="000000"/>
+                </a:solidFill>
+                <a:latin typeface="Arial"/>
+                <a:ea typeface="Arial"/>
+                <a:cs typeface="Arial"/>
+                <a:sym typeface="Arial"/>
+              </a:defRPr>
+            </a:lvl2pPr>
+            <a:lvl3pPr marR="0" lvl="2" algn="l" rtl="0">
+              <a:lnSpc>
+                <a:spcPct val="100000"/>
+              </a:lnSpc>
+              <a:spcBef>
+                <a:spcPts val="0"/>
+              </a:spcBef>
+              <a:spcAft>
+                <a:spcPts val="0"/>
+              </a:spcAft>
+              <a:buClr>
+                <a:srgbClr val="000000"/>
+              </a:buClr>
+              <a:buFont typeface="Arial"/>
+              <a:defRPr sz="1400" b="0" i="0" u="none" strike="noStrike" cap="none" spc="0">
+                <a:solidFill>
+                  <a:srgbClr val="000000"/>
+                </a:solidFill>
+                <a:latin typeface="Arial"/>
+                <a:ea typeface="Arial"/>
+                <a:cs typeface="Arial"/>
+                <a:sym typeface="Arial"/>
+              </a:defRPr>
+            </a:lvl3pPr>
+            <a:lvl4pPr marR="0" lvl="3" algn="l" rtl="0">
+              <a:lnSpc>
+                <a:spcPct val="100000"/>
+              </a:lnSpc>
+              <a:spcBef>
+                <a:spcPts val="0"/>
+              </a:spcBef>
+              <a:spcAft>
+                <a:spcPts val="0"/>
+              </a:spcAft>
+              <a:buClr>
+                <a:srgbClr val="000000"/>
+              </a:buClr>
+              <a:buFont typeface="Arial"/>
+              <a:defRPr sz="1400" b="0" i="0" u="none" strike="noStrike" cap="none" spc="0">
+                <a:solidFill>
+                  <a:srgbClr val="000000"/>
+                </a:solidFill>
+                <a:latin typeface="Arial"/>
+                <a:ea typeface="Arial"/>
+                <a:cs typeface="Arial"/>
+                <a:sym typeface="Arial"/>
+              </a:defRPr>
+            </a:lvl4pPr>
+            <a:lvl5pPr marR="0" lvl="4" algn="l" rtl="0">
+              <a:lnSpc>
+                <a:spcPct val="100000"/>
+              </a:lnSpc>
+              <a:spcBef>
+                <a:spcPts val="0"/>
+              </a:spcBef>
+              <a:spcAft>
+                <a:spcPts val="0"/>
+              </a:spcAft>
+              <a:buClr>
+                <a:srgbClr val="000000"/>
+              </a:buClr>
+              <a:buFont typeface="Arial"/>
+              <a:defRPr sz="1400" b="0" i="0" u="none" strike="noStrike" cap="none" spc="0">
+                <a:solidFill>
+                  <a:srgbClr val="000000"/>
+                </a:solidFill>
+                <a:latin typeface="Arial"/>
+                <a:ea typeface="Arial"/>
+                <a:cs typeface="Arial"/>
+                <a:sym typeface="Arial"/>
+              </a:defRPr>
+            </a:lvl5pPr>
+            <a:lvl6pPr marR="0" lvl="5" algn="l" rtl="0">
+              <a:lnSpc>
+                <a:spcPct val="100000"/>
+              </a:lnSpc>
+              <a:spcBef>
+                <a:spcPts val="0"/>
+              </a:spcBef>
+              <a:spcAft>
+                <a:spcPts val="0"/>
+              </a:spcAft>
+              <a:buClr>
+                <a:srgbClr val="000000"/>
+              </a:buClr>
+              <a:buFont typeface="Arial"/>
+              <a:defRPr sz="1400" b="0" i="0" u="none" strike="noStrike" cap="none" spc="0">
+                <a:solidFill>
+                  <a:srgbClr val="000000"/>
+                </a:solidFill>
+                <a:latin typeface="Arial"/>
+                <a:ea typeface="Arial"/>
+                <a:cs typeface="Arial"/>
+                <a:sym typeface="Arial"/>
+              </a:defRPr>
+            </a:lvl6pPr>
+            <a:lvl7pPr marR="0" lvl="6" algn="l" rtl="0">
+              <a:lnSpc>
+                <a:spcPct val="100000"/>
+              </a:lnSpc>
+              <a:spcBef>
+                <a:spcPts val="0"/>
+              </a:spcBef>
+              <a:spcAft>
+                <a:spcPts val="0"/>
+              </a:spcAft>
+              <a:buClr>
+                <a:srgbClr val="000000"/>
+              </a:buClr>
+              <a:buFont typeface="Arial"/>
+              <a:defRPr sz="1400" b="0" i="0" u="none" strike="noStrike" cap="none" spc="0">
+                <a:solidFill>
+                  <a:srgbClr val="000000"/>
+                </a:solidFill>
+                <a:latin typeface="Arial"/>
+                <a:ea typeface="Arial"/>
+                <a:cs typeface="Arial"/>
+                <a:sym typeface="Arial"/>
+              </a:defRPr>
+            </a:lvl7pPr>
+            <a:lvl8pPr marR="0" lvl="7" algn="l" rtl="0">
+              <a:lnSpc>
+                <a:spcPct val="100000"/>
+              </a:lnSpc>
+              <a:spcBef>
+                <a:spcPts val="0"/>
+              </a:spcBef>
+              <a:spcAft>
+                <a:spcPts val="0"/>
+              </a:spcAft>
+              <a:buClr>
+                <a:srgbClr val="000000"/>
+              </a:buClr>
+              <a:buFont typeface="Arial"/>
+              <a:defRPr sz="1400" b="0" i="0" u="none" strike="noStrike" cap="none" spc="0">
+                <a:solidFill>
+                  <a:srgbClr val="000000"/>
+                </a:solidFill>
+                <a:latin typeface="Arial"/>
+                <a:ea typeface="Arial"/>
+                <a:cs typeface="Arial"/>
+                <a:sym typeface="Arial"/>
+              </a:defRPr>
+            </a:lvl8pPr>
+            <a:lvl9pPr marR="0" lvl="8" algn="l" rtl="0">
+              <a:lnSpc>
+                <a:spcPct val="100000"/>
+              </a:lnSpc>
+              <a:spcBef>
+                <a:spcPts val="0"/>
+              </a:spcBef>
+              <a:spcAft>
+                <a:spcPts val="0"/>
+              </a:spcAft>
+              <a:buClr>
+                <a:srgbClr val="000000"/>
+              </a:buClr>
+              <a:buFont typeface="Arial"/>
+              <a:defRPr sz="1400" b="0" i="0" u="none" strike="noStrike" cap="none" spc="0">
+                <a:solidFill>
+                  <a:srgbClr val="000000"/>
+                </a:solidFill>
+                <a:latin typeface="Arial"/>
+                <a:ea typeface="Arial"/>
+                <a:cs typeface="Arial"/>
+                <a:sym typeface="Arial"/>
+              </a:defRPr>
+            </a:lvl9pPr>
+          </a:lstStyle>
+          <a:p>
+            <a:pPr>
+              <a:lnSpc>
+                <a:spcPct val="120000"/>
+              </a:lnSpc>
+            </a:pPr>
+            <a:r>
+              <a:rPr lang="ja-JP" altLang="ja-JP" sz="2800" b="1" dirty="0"/>
+              <a:t>② 3Dマップ</a:t>
+            </a:r>
+          </a:p>
+          <a:p>
+            <a:pPr>
+              <a:lnSpc>
+                <a:spcPct val="120000"/>
+              </a:lnSpc>
+            </a:pPr>
+            <a:r>
+              <a:rPr lang="ja-JP" altLang="ja-JP" sz="2800" b="1" dirty="0"/>
+              <a:t>制作済み</a:t>
+            </a:r>
+            <a:endParaRPr lang="ja-JP" altLang="ja-JP" sz="2800" dirty="0"/>
+          </a:p>
+          <a:p>
+            <a:pPr lvl="0">
+              <a:lnSpc>
+                <a:spcPct val="120000"/>
+              </a:lnSpc>
+            </a:pPr>
+            <a:r>
+              <a:rPr lang="ja-JP" altLang="ja-JP" sz="2800" dirty="0"/>
+              <a:t>Webサイトへの組み込み </a:t>
+            </a:r>
+          </a:p>
+          <a:p>
+            <a:pPr lvl="0">
+              <a:lnSpc>
+                <a:spcPct val="120000"/>
+              </a:lnSpc>
+            </a:pPr>
+            <a:r>
+              <a:rPr lang="ja-JP" altLang="ja-JP" sz="2800" dirty="0"/>
+              <a:t>3Dマップの基本的な操作 </a:t>
+            </a:r>
+            <a:endParaRPr lang="en-US" altLang="ja-JP" sz="2800" dirty="0"/>
+          </a:p>
+          <a:p>
+            <a:pPr lvl="0">
+              <a:lnSpc>
+                <a:spcPct val="120000"/>
+              </a:lnSpc>
+            </a:pPr>
+            <a:endParaRPr lang="ja-JP" altLang="ja-JP" sz="2800" dirty="0"/>
+          </a:p>
+          <a:p>
+            <a:pPr>
+              <a:lnSpc>
+                <a:spcPct val="120000"/>
+              </a:lnSpc>
+            </a:pPr>
+            <a:r>
+              <a:rPr lang="ja-JP" altLang="ja-JP" sz="2800" b="1" dirty="0"/>
+              <a:t>制作中・調整</a:t>
+            </a:r>
+            <a:endParaRPr lang="ja-JP" altLang="ja-JP" sz="2800" dirty="0"/>
+          </a:p>
+          <a:p>
+            <a:pPr lvl="0">
+              <a:lnSpc>
+                <a:spcPct val="120000"/>
+              </a:lnSpc>
+            </a:pPr>
+            <a:r>
+              <a:rPr lang="ja-JP" altLang="ja-JP" sz="2800" dirty="0"/>
+              <a:t>建物・道路の配置調整 </a:t>
+            </a:r>
+          </a:p>
+          <a:p>
+            <a:pPr lvl="0">
+              <a:lnSpc>
+                <a:spcPct val="120000"/>
+              </a:lnSpc>
+            </a:pPr>
+            <a:r>
+              <a:rPr lang="ja-JP" altLang="ja-JP" sz="2800" dirty="0"/>
+              <a:t>Blenderでの建物の3Dモデル制作 </a:t>
+            </a:r>
+          </a:p>
+          <a:p>
+            <a:pPr>
+              <a:lnSpc>
+                <a:spcPct val="120000"/>
+              </a:lnSpc>
+            </a:pPr>
+            <a:r>
+              <a:rPr lang="ja-JP" altLang="ja-JP" sz="2800" b="1" dirty="0"/>
+              <a:t>▶ </a:t>
+            </a:r>
+            <a:r>
+              <a:rPr lang="ja-JP" altLang="ja-JP" sz="2800" b="1" dirty="0">
+                <a:hlinkClick r:id="rId4"/>
+              </a:rPr>
+              <a:t>3Dマップを確認</a:t>
+            </a:r>
+            <a:endParaRPr lang="ja-JP" altLang="ja-JP" sz="2800" dirty="0"/>
+          </a:p>
+        </p:txBody>
+      </p:sp>
     </p:spTree>
     <p:extLst>
       <p:ext uri="{BB962C8B-B14F-4D97-AF65-F5344CB8AC3E}">

--- a/卒業制作 テーマ・中間発表.pptx
+++ b/卒業制作 テーマ・中間発表.pptx
@@ -254,7 +254,7 @@
       <p15:sldGuideLst xmlns:p15="http://schemas.microsoft.com/office/powerpoint/2012/main"/>
     </p:ext>
     <p:ext uri="GoogleSlidesCustomDataVersion2">
-      <go:slidesCustomData xmlns:go="http://customooxmlschemas.google.com/" xmlns:ahyp="http://schemas.microsoft.com/office/drawing/2018/hyperlinkcolor" xmlns:p15="http://schemas.microsoft.com/office/powerpoint/2012/main" xmlns:p14="http://schemas.microsoft.com/office/powerpoint/2010/main" xmlns:com="http://schemas.openxmlformats.org/drawingml/2006/compatibility" xmlns:pvml="urn:schemas-microsoft-com:office:powerpoint" xmlns:v="urn:schemas-microsoft-com:vml" xmlns:o="urn:schemas-microsoft-com:office:office" xmlns:dgm="http://schemas.openxmlformats.org/drawingml/2006/diagram" xmlns:c="http://schemas.openxmlformats.org/drawingml/2006/chart" xmlns:mv="urn:schemas-microsoft-com:mac:vml" xmlns:mc="http://schemas.openxmlformats.org/markup-compatibility/2006" xmlns="" r:id="rId12" roundtripDataSignature="AMtx7mjQGFfbmcF/F6CMXnR89bWTo9kz7g=="/>
+      <go:slidesCustomData xmlns="" xmlns:mc="http://schemas.openxmlformats.org/markup-compatibility/2006" xmlns:mv="urn:schemas-microsoft-com:mac:vml" xmlns:c="http://schemas.openxmlformats.org/drawingml/2006/chart" xmlns:dgm="http://schemas.openxmlformats.org/drawingml/2006/diagram" xmlns:o="urn:schemas-microsoft-com:office:office" xmlns:v="urn:schemas-microsoft-com:vml" xmlns:pvml="urn:schemas-microsoft-com:office:powerpoint" xmlns:com="http://schemas.openxmlformats.org/drawingml/2006/compatibility" xmlns:p14="http://schemas.microsoft.com/office/powerpoint/2010/main" xmlns:p15="http://schemas.microsoft.com/office/powerpoint/2012/main" xmlns:ahyp="http://schemas.microsoft.com/office/drawing/2018/hyperlinkcolor" xmlns:go="http://customooxmlschemas.google.com/" r:id="rId12" roundtripDataSignature="AMtx7mjQGFfbmcF/F6CMXnR89bWTo9kz7g=="/>
     </p:ext>
   </p:extLst>
 </p:presentation>
@@ -897,7 +897,7 @@
             </a:pPr>
             <a:r>
               <a:rPr lang="ja-JP" altLang="ja-JP" dirty="0"/>
-              <a:t>25098 安永卓真。これから、卒業制作の中間発表を始めます。</a:t>
+              <a:t>25098 安永卓真。これから、卒業制作の予備審査発表を始めます。</a:t>
             </a:r>
             <a:endParaRPr dirty="0"/>
           </a:p>
@@ -1014,14 +1014,6 @@
             <a:r>
               <a:rPr lang="ja-JP" altLang="ja-JP" dirty="0"/>
               <a:t>私の卒業制作のテーマは、豆田町について知ってもらうためのWebコンテンツ制作です。</a:t>
-            </a:r>
-            <a:r>
-              <a:rPr lang="ja-JP" altLang="en-US" dirty="0"/>
-              <a:t>　</a:t>
-            </a:r>
-            <a:r>
-              <a:rPr lang="ja-JP" altLang="ja-JP" dirty="0"/>
-              <a:t>よろしくお願いします。</a:t>
             </a:r>
           </a:p>
         </p:txBody>
@@ -1413,7 +1405,15 @@
             </a:pPr>
             <a:r>
               <a:rPr lang="ja-JP" altLang="ja-JP" dirty="0"/>
-              <a:t>豆田町について調べたところ、江戸時代の町割りが残っており、白壁の建物や古い町家など、歴史を感じられる町並みが特徴だと分かりました。</a:t>
+              <a:t>豆田町について調べたところ、江戸時代の町割り（まちわり）が残っており、白壁（しらかべ）の建物や古い</a:t>
+            </a:r>
+            <a:r>
+              <a:rPr lang="ja-JP" altLang="en-US" dirty="0"/>
+              <a:t>まちや</a:t>
+            </a:r>
+            <a:r>
+              <a:rPr lang="ja-JP" altLang="ja-JP" dirty="0"/>
+              <a:t>など、歴史を感じられる町並みが特徴だと分かりました。</a:t>
             </a:r>
           </a:p>
           <a:p>
@@ -1422,7 +1422,39 @@
             </a:pPr>
             <a:r>
               <a:rPr lang="ja-JP" altLang="ja-JP" dirty="0"/>
-              <a:t>また、草野本家や薫長酒蔵資料館などの観光スポットがあり、グルメやお店などもあるため、町並みを歩きながら観光を楽しめる地域だと分かりました。</a:t>
+              <a:t>また、草野本家</a:t>
+            </a:r>
+            <a:r>
+              <a:rPr lang="ja-JP" altLang="en-US" dirty="0"/>
+              <a:t>（</a:t>
+            </a:r>
+            <a:r>
+              <a:rPr lang="ja-JP" altLang="ja-JP" dirty="0"/>
+              <a:t>くさのほんけ</a:t>
+            </a:r>
+            <a:r>
+              <a:rPr lang="ja-JP" altLang="en-US" dirty="0"/>
+              <a:t>）</a:t>
+            </a:r>
+            <a:r>
+              <a:rPr lang="ja-JP" altLang="ja-JP" dirty="0"/>
+              <a:t>や薫長酒蔵資料館</a:t>
+            </a:r>
+            <a:r>
+              <a:rPr lang="ja-JP" altLang="en-US" dirty="0"/>
+              <a:t>（</a:t>
+            </a:r>
+            <a:r>
+              <a:rPr lang="ja-JP" altLang="ja-JP" dirty="0"/>
+              <a:t>くんちょうさかぐらしりょうかん</a:t>
+            </a:r>
+            <a:r>
+              <a:rPr lang="ja-JP" altLang="en-US" dirty="0"/>
+              <a:t>）</a:t>
+            </a:r>
+            <a:r>
+              <a:rPr lang="ja-JP" altLang="ja-JP" dirty="0"/>
+              <a:t>などの観光スポットがあり、グルメやお店などもあるため、町並みを歩きながら観光を楽しめる地域だと分かりました。</a:t>
             </a:r>
           </a:p>
         </p:txBody>
@@ -1497,9 +1529,20 @@
               <a:rPr lang="ja-JP" altLang="en-US" dirty="0"/>
               <a:t>　</a:t>
             </a:r>
+            <a:br>
+              <a:rPr lang="en-US" altLang="ja-JP" dirty="0"/>
+            </a:br>
             <a:r>
               <a:rPr lang="ja-JP" altLang="ja-JP" dirty="0"/>
-              <a:t>Webサイトの制作では、豆田町についてや観光スポット、グルメ、アクセス情報などを紹介します。</a:t>
+              <a:t>Webサイトでは、豆田町について</a:t>
+            </a:r>
+            <a:r>
+              <a:rPr lang="ja-JP" altLang="en-US" dirty="0"/>
+              <a:t>、</a:t>
+            </a:r>
+            <a:r>
+              <a:rPr lang="ja-JP" altLang="ja-JP" dirty="0"/>
+              <a:t>観光スポット、グルメ、アクセス情報などを紹介します。</a:t>
             </a:r>
           </a:p>
           <a:p>
@@ -1508,7 +1551,7 @@
             </a:pPr>
             <a:r>
               <a:rPr lang="ja-JP" altLang="ja-JP" dirty="0"/>
-              <a:t>3Dマップの制作では、Three.jsを使用して、豆田町の街並みや観光スポットを立体的に表現します。</a:t>
+              <a:t>3Dマップでは、Three.jsを使用して、豆田町の街並みや観光スポットを立体的に表現します。</a:t>
             </a:r>
             <a:endParaRPr lang="en-US" altLang="ja-JP" dirty="0"/>
           </a:p>
@@ -1518,7 +1561,15 @@
             </a:pPr>
             <a:r>
               <a:rPr lang="ja-JP" altLang="ja-JP" dirty="0"/>
-              <a:t>研究で調べた情報をWebサイトや3Dマップに取り入れ、豆田町の魅力を分かりやすく伝えられる作品を目指しています。</a:t>
+              <a:t>研究で調べた情報を</a:t>
+            </a:r>
+            <a:r>
+              <a:rPr lang="ja-JP" altLang="en-US" dirty="0"/>
+              <a:t>作品に</a:t>
+            </a:r>
+            <a:r>
+              <a:rPr lang="ja-JP" altLang="ja-JP" dirty="0"/>
+              <a:t>取り入れ、豆田町の魅力を分かりやすく伝えられる作品を目指しています。</a:t>
             </a:r>
           </a:p>
         </p:txBody>
@@ -1653,8 +1704,13 @@
             </a:pPr>
             <a:r>
               <a:rPr lang="ja-JP" altLang="ja-JP" dirty="0"/>
-              <a:t>グルメ・お店とアクセスのページは現在制作中で、その他にも各ページのレイアウトの調整や修正、不足している写真の補充や写真の修正を進めています。</a:t>
+              <a:t>グルメ・お店とアクセスのページは制作中で、レイアウトの調整や修正、写真の補充</a:t>
             </a:r>
+            <a:r>
+              <a:rPr lang="ja-JP" altLang="en-US" dirty="0"/>
+              <a:t>なども進めています。</a:t>
+            </a:r>
+            <a:endParaRPr lang="ja-JP" altLang="ja-JP" dirty="0"/>
           </a:p>
           <a:p>
             <a:pPr marL="158750" indent="0">
@@ -1662,8 +1718,25 @@
             </a:pPr>
             <a:r>
               <a:rPr lang="ja-JP" altLang="ja-JP" dirty="0"/>
-              <a:t>次に、3Dマップについてです。</a:t>
+              <a:t>3Dマップについて</a:t>
             </a:r>
+            <a:r>
+              <a:rPr lang="ja-JP" altLang="en-US" dirty="0"/>
+              <a:t>は、</a:t>
+            </a:r>
+            <a:r>
+              <a:rPr lang="ja-JP" altLang="ja-JP" dirty="0"/>
+              <a:t>Webサイトへの組み込み</a:t>
+            </a:r>
+            <a:r>
+              <a:rPr lang="ja-JP" altLang="en-US" dirty="0"/>
+              <a:t>と</a:t>
+            </a:r>
+            <a:r>
+              <a:rPr lang="ja-JP" altLang="ja-JP" dirty="0"/>
+              <a:t>基本的な操作は制作済みです。</a:t>
+            </a:r>
+            <a:endParaRPr lang="en-US" altLang="ja-JP" dirty="0"/>
           </a:p>
           <a:p>
             <a:pPr marL="158750" indent="0">
@@ -1671,7 +1744,7 @@
             </a:pPr>
             <a:r>
               <a:rPr lang="ja-JP" altLang="ja-JP" dirty="0"/>
-              <a:t>Webサイトへの組み込みと、3Dマップの基本的な操作は制作済みです。現在は、建物や道路の配置を調整しており、Blenderで建物の3Dモデルも制作しています。</a:t>
+              <a:t>現在は、建物や道路の配置を調整しており、Blenderで建物の3Dモデルも制作しています。</a:t>
             </a:r>
           </a:p>
         </p:txBody>
@@ -1749,7 +1822,50 @@
             </a:pPr>
             <a:r>
               <a:rPr lang="ja-JP" altLang="ja-JP" dirty="0"/>
-              <a:t>10月から11月にかけては、Webサイトと3Dマップの制作を進めます。各ページのデザインやレイアウトを整え、写真の補充や改善を行います。また、Blenderで建物を制作し、Three.jsを使用してWebサイトに組み込んでいきます。</a:t>
+              <a:t>まず10月は、Webサイトの制作を進め</a:t>
+            </a:r>
+            <a:r>
+              <a:rPr lang="ja-JP" altLang="en-US" dirty="0"/>
+              <a:t>、</a:t>
+            </a:r>
+            <a:r>
+              <a:rPr lang="ja-JP" altLang="ja-JP" dirty="0"/>
+              <a:t>写真の補充や改善を行い</a:t>
+            </a:r>
+            <a:r>
+              <a:rPr lang="ja-JP" altLang="en-US" dirty="0"/>
+              <a:t>ます。</a:t>
+            </a:r>
+            <a:br>
+              <a:rPr lang="en-US" altLang="ja-JP" dirty="0"/>
+            </a:br>
+            <a:r>
+              <a:rPr lang="ja-JP" altLang="ja-JP" dirty="0"/>
+              <a:t>また、3Dマップの制作も</a:t>
+            </a:r>
+            <a:r>
+              <a:rPr lang="ja-JP" altLang="en-US" dirty="0"/>
+              <a:t>引き続き進め、</a:t>
+            </a:r>
+            <a:r>
+              <a:rPr lang="ja-JP" altLang="ja-JP" dirty="0"/>
+              <a:t>Blenderで建物</a:t>
+            </a:r>
+            <a:r>
+              <a:rPr lang="ja-JP" altLang="en-US" dirty="0"/>
+              <a:t>を</a:t>
+            </a:r>
+            <a:r>
+              <a:rPr lang="ja-JP" altLang="ja-JP" dirty="0"/>
+              <a:t>制作</a:t>
+            </a:r>
+            <a:r>
+              <a:rPr lang="ja-JP" altLang="en-US" dirty="0"/>
+              <a:t>し</a:t>
+            </a:r>
+            <a:r>
+              <a:rPr lang="ja-JP" altLang="ja-JP" dirty="0"/>
+              <a:t>ます。</a:t>
             </a:r>
           </a:p>
           <a:p>
@@ -1758,7 +1874,32 @@
             </a:pPr>
             <a:r>
               <a:rPr lang="ja-JP" altLang="ja-JP" dirty="0"/>
-              <a:t>12月には、各ページや3Dマップの動作確認と修正を行い、表示や操作性を改善します。最後に、全体の仕上げと最終確認を行い、卒業制作の完成を目指します。</a:t>
+              <a:t>11月は、3Dマップの制作を進め</a:t>
+            </a:r>
+            <a:r>
+              <a:rPr lang="ja-JP" altLang="en-US" dirty="0"/>
+              <a:t>、</a:t>
+            </a:r>
+            <a:r>
+              <a:rPr lang="ja-JP" altLang="ja-JP" dirty="0"/>
+              <a:t>完成した建物をThree.jsを使用してWebサイトに組み込</a:t>
+            </a:r>
+            <a:r>
+              <a:rPr lang="ja-JP" altLang="en-US" dirty="0"/>
+              <a:t>みます。</a:t>
+            </a:r>
+            <a:r>
+              <a:rPr lang="ja-JP" altLang="ja-JP" dirty="0"/>
+              <a:t>また、デザインやレイアウトを整え、動作確認と修正を行います。</a:t>
+            </a:r>
+          </a:p>
+          <a:p>
+            <a:pPr marL="158750" indent="0">
+              <a:buNone/>
+            </a:pPr>
+            <a:r>
+              <a:rPr lang="ja-JP" altLang="ja-JP" dirty="0"/>
+              <a:t>12月は、最終調整と最終確認を行い、卒業制作を完成させる予定です。</a:t>
             </a:r>
           </a:p>
         </p:txBody>
@@ -1884,14 +2025,22 @@
             </a:br>
             <a:r>
               <a:rPr lang="ja-JP" altLang="ja-JP" dirty="0"/>
-              <a:t>まず、使用ソフトについてです。Webサイトの制作にはVisual Studio Codeを使用し、建物の3Dモデル制作にはBlender、3Dマップの表示や操作にはThree.jsを使用しています。また、必要に応じてPhotoshopで写真の加工や編集を行います。</a:t>
+              <a:t>Webサイトの制作にはVisual Studio Codeを使用し、3Dモデル制作にはBlender、3DマップにはThree.jsを使用しています。</a:t>
             </a:r>
             <a:br>
               <a:rPr lang="en-US" altLang="ja-JP" dirty="0"/>
             </a:br>
             <a:r>
               <a:rPr lang="ja-JP" altLang="ja-JP" dirty="0"/>
-              <a:t>使用機材は、ノートパソコンとマウスを中心に、スマートフォンで写真撮影やWebサイトの表示確認を行います。</a:t>
+              <a:t>使用機材は、ノートパソコンとマウスを中心に、</a:t>
+            </a:r>
+            <a:r>
+              <a:rPr lang="ja-JP" altLang="en-US" dirty="0"/>
+              <a:t>スマホ</a:t>
+            </a:r>
+            <a:r>
+              <a:rPr lang="ja-JP" altLang="ja-JP" dirty="0"/>
+              <a:t>で写真撮影や表示確認を行います。</a:t>
             </a:r>
           </a:p>
           <a:p>
@@ -1899,8 +2048,20 @@
               <a:buNone/>
             </a:pPr>
             <a:r>
+              <a:rPr lang="ja-JP" altLang="en-US" dirty="0"/>
+              <a:t>情報収集に</a:t>
+            </a:r>
+            <a:r>
               <a:rPr lang="ja-JP" altLang="ja-JP" dirty="0"/>
-              <a:t>参照サイトはGoogleを使用し、豆田町の観光情報や制作に必要な情報を調べています。</a:t>
+              <a:t>はGoogle</a:t>
+            </a:r>
+            <a:r>
+              <a:rPr lang="ja-JP" altLang="en-US" dirty="0"/>
+              <a:t>検索</a:t>
+            </a:r>
+            <a:r>
+              <a:rPr lang="ja-JP" altLang="ja-JP" dirty="0"/>
+              <a:t>を使用し、豆田町の観光情報や制作に必要な情報を調べています。</a:t>
             </a:r>
           </a:p>
           <a:p>
@@ -1909,7 +2070,7 @@
             </a:pPr>
             <a:r>
               <a:rPr lang="ja-JP" altLang="ja-JP" dirty="0"/>
-              <a:t>以上で、卒業制作の中間発表を終わります。ご清聴ありがとうございました。</a:t>
+              <a:t>以上で、卒業制作の予備審査発表を終わります。ご清聴ありがとうございました。</a:t>
             </a:r>
           </a:p>
         </p:txBody>
@@ -17920,14 +18081,14 @@
           <p:nvPr>
             <p:extLst>
               <p:ext uri="{D42A27DB-BD31-4B8C-83A1-F6EECF244321}">
-                <p14:modId xmlns:p14="http://schemas.microsoft.com/office/powerpoint/2010/main" val="2530660516"/>
+                <p14:modId xmlns:p14="http://schemas.microsoft.com/office/powerpoint/2010/main" val="2169539909"/>
               </p:ext>
             </p:extLst>
           </p:nvPr>
         </p:nvGraphicFramePr>
         <p:xfrm>
-          <a:off x="762000" y="1690825"/>
-          <a:ext cx="10668000" cy="4465110"/>
+          <a:off x="762001" y="1690825"/>
+          <a:ext cx="9652000" cy="4450080"/>
         </p:xfrm>
         <a:graphic>
           <a:graphicData uri="http://schemas.openxmlformats.org/drawingml/2006/table">
@@ -17936,14 +18097,14 @@
                 <a:tableStyleId>{5C22544A-7EE6-4342-B048-85BDC9FD1C3A}</a:tableStyleId>
               </a:tblPr>
               <a:tblGrid>
-                <a:gridCol w="2762024">
+                <a:gridCol w="2498974">
                   <a:extLst>
                     <a:ext uri="{9D8B030D-6E8A-4147-A177-3AD203B41FA5}">
                       <a16:colId xmlns:a16="http://schemas.microsoft.com/office/drawing/2014/main" val="271450046"/>
                     </a:ext>
                   </a:extLst>
                 </a:gridCol>
-                <a:gridCol w="7905976">
+                <a:gridCol w="7153026">
                   <a:extLst>
                     <a:ext uri="{9D8B030D-6E8A-4147-A177-3AD203B41FA5}">
                       <a16:colId xmlns:a16="http://schemas.microsoft.com/office/drawing/2014/main" val="1606014004"/>
@@ -17951,7 +18112,7 @@
                   </a:extLst>
                 </a:gridCol>
               </a:tblGrid>
-              <a:tr h="2232555">
+              <a:tr h="1738175">
                 <a:tc>
                   <a:txBody>
                     <a:bodyPr/>
@@ -18028,7 +18189,7 @@
                   </a:ext>
                 </a:extLst>
               </a:tr>
-              <a:tr h="2232555">
+              <a:tr h="1738175">
                 <a:tc>
                   <a:txBody>
                     <a:bodyPr/>
@@ -18080,6 +18241,508 @@
                 <a:extLst>
                   <a:ext uri="{0D108BD9-81ED-4DB2-BD59-A6C34878D82A}">
                     <a16:rowId xmlns:a16="http://schemas.microsoft.com/office/drawing/2014/main" val="91263317"/>
+                  </a:ext>
+                </a:extLst>
+              </a:tr>
+            </a:tbl>
+          </a:graphicData>
+        </a:graphic>
+      </p:graphicFrame>
+      <p:graphicFrame>
+        <p:nvGraphicFramePr>
+          <p:cNvPr id="3" name="表 2">
+            <a:extLst>
+              <a:ext uri="{FF2B5EF4-FFF2-40B4-BE49-F238E27FC236}">
+                <a16:creationId xmlns:a16="http://schemas.microsoft.com/office/drawing/2014/main" id="{1EA1D0AE-488D-8B27-9475-85A8AAC5F012}"/>
+              </a:ext>
+            </a:extLst>
+          </p:cNvPr>
+          <p:cNvGraphicFramePr>
+            <a:graphicFrameLocks noGrp="1"/>
+          </p:cNvGraphicFramePr>
+          <p:nvPr>
+            <p:extLst>
+              <p:ext uri="{D42A27DB-BD31-4B8C-83A1-F6EECF244321}">
+                <p14:modId xmlns:p14="http://schemas.microsoft.com/office/powerpoint/2010/main" val="3102565278"/>
+              </p:ext>
+            </p:extLst>
+          </p:nvPr>
+        </p:nvGraphicFramePr>
+        <p:xfrm>
+          <a:off x="762000" y="1690824"/>
+          <a:ext cx="10668000" cy="4577950"/>
+        </p:xfrm>
+        <a:graphic>
+          <a:graphicData uri="http://schemas.openxmlformats.org/drawingml/2006/table">
+            <a:tbl>
+              <a:tblPr firstCol="1" bandRow="1">
+                <a:tableStyleId>{5C22544A-7EE6-4342-B048-85BDC9FD1C3A}</a:tableStyleId>
+              </a:tblPr>
+              <a:tblGrid>
+                <a:gridCol w="2743201">
+                  <a:extLst>
+                    <a:ext uri="{9D8B030D-6E8A-4147-A177-3AD203B41FA5}">
+                      <a16:colId xmlns:a16="http://schemas.microsoft.com/office/drawing/2014/main" val="879746513"/>
+                    </a:ext>
+                  </a:extLst>
+                </a:gridCol>
+                <a:gridCol w="7924799">
+                  <a:extLst>
+                    <a:ext uri="{9D8B030D-6E8A-4147-A177-3AD203B41FA5}">
+                      <a16:colId xmlns:a16="http://schemas.microsoft.com/office/drawing/2014/main" val="525122852"/>
+                    </a:ext>
+                  </a:extLst>
+                </a:gridCol>
+              </a:tblGrid>
+              <a:tr h="1385402">
+                <a:tc>
+                  <a:txBody>
+                    <a:bodyPr/>
+                    <a:lstStyle/>
+                    <a:p>
+                      <a:pPr algn="ctr"/>
+                      <a:r>
+                        <a:rPr kumimoji="1" lang="en-US" altLang="ja-JP" sz="4400" dirty="0"/>
+                        <a:t>10</a:t>
+                      </a:r>
+                      <a:r>
+                        <a:rPr kumimoji="1" lang="ja-JP" altLang="en-US" sz="4400" dirty="0"/>
+                        <a:t>月</a:t>
+                      </a:r>
+                    </a:p>
+                  </a:txBody>
+                  <a:tcPr anchor="ctr"/>
+                </a:tc>
+                <a:tc>
+                  <a:txBody>
+                    <a:bodyPr/>
+                    <a:lstStyle/>
+                    <a:p>
+                      <a:pPr marL="0" marR="0" lvl="0" indent="0" algn="l" defTabSz="914400" rtl="0" eaLnBrk="1" fontAlgn="auto" latinLnBrk="0" hangingPunct="1">
+                        <a:lnSpc>
+                          <a:spcPct val="100000"/>
+                        </a:lnSpc>
+                        <a:spcBef>
+                          <a:spcPts val="0"/>
+                        </a:spcBef>
+                        <a:spcAft>
+                          <a:spcPts val="0"/>
+                        </a:spcAft>
+                        <a:buClr>
+                          <a:srgbClr val="000000"/>
+                        </a:buClr>
+                        <a:buSzTx/>
+                        <a:buFont typeface="Arial"/>
+                        <a:buNone/>
+                        <a:tabLst/>
+                        <a:defRPr/>
+                      </a:pPr>
+                      <a:r>
+                        <a:rPr lang="ja-JP" altLang="ja-JP" sz="2400" b="1" dirty="0">
+                          <a:solidFill>
+                            <a:schemeClr val="tx1"/>
+                          </a:solidFill>
+                        </a:rPr>
+                        <a:t>Webサイト</a:t>
+                      </a:r>
+                      <a:endParaRPr lang="en-US" altLang="ja-JP" sz="2400" dirty="0">
+                        <a:solidFill>
+                          <a:schemeClr val="tx1"/>
+                        </a:solidFill>
+                      </a:endParaRPr>
+                    </a:p>
+                    <a:p>
+                      <a:pPr marL="0" marR="0" lvl="0" indent="0" algn="l" defTabSz="914400" rtl="0" eaLnBrk="1" fontAlgn="auto" latinLnBrk="0" hangingPunct="1">
+                        <a:lnSpc>
+                          <a:spcPct val="100000"/>
+                        </a:lnSpc>
+                        <a:spcBef>
+                          <a:spcPts val="0"/>
+                        </a:spcBef>
+                        <a:spcAft>
+                          <a:spcPts val="0"/>
+                        </a:spcAft>
+                        <a:buClr>
+                          <a:srgbClr val="000000"/>
+                        </a:buClr>
+                        <a:buSzTx/>
+                        <a:buFont typeface="Arial"/>
+                        <a:buNone/>
+                        <a:tabLst/>
+                        <a:defRPr/>
+                      </a:pPr>
+                      <a:r>
+                        <a:rPr lang="ja-JP" altLang="ja-JP" sz="2400" dirty="0">
+                          <a:solidFill>
+                            <a:schemeClr val="tx1"/>
+                          </a:solidFill>
+                        </a:rPr>
+                        <a:t>・写真の補充や既存写真の改善を行う。</a:t>
+                      </a:r>
+                      <a:endParaRPr lang="en-US" altLang="ja-JP" sz="2400" dirty="0">
+                        <a:solidFill>
+                          <a:schemeClr val="tx1"/>
+                        </a:solidFill>
+                      </a:endParaRPr>
+                    </a:p>
+                    <a:p>
+                      <a:pPr marL="0" marR="0" lvl="0" indent="0" algn="l" defTabSz="914400" rtl="0" eaLnBrk="1" fontAlgn="auto" latinLnBrk="0" hangingPunct="1">
+                        <a:lnSpc>
+                          <a:spcPct val="100000"/>
+                        </a:lnSpc>
+                        <a:spcBef>
+                          <a:spcPts val="0"/>
+                        </a:spcBef>
+                        <a:spcAft>
+                          <a:spcPts val="0"/>
+                        </a:spcAft>
+                        <a:buClr>
+                          <a:srgbClr val="000000"/>
+                        </a:buClr>
+                        <a:buSzTx/>
+                        <a:buFont typeface="Arial"/>
+                        <a:buNone/>
+                        <a:tabLst/>
+                        <a:defRPr/>
+                      </a:pPr>
+                      <a:r>
+                        <a:rPr lang="ja-JP" altLang="ja-JP" sz="2400" dirty="0">
+                          <a:solidFill>
+                            <a:schemeClr val="tx1"/>
+                          </a:solidFill>
+                        </a:rPr>
+                        <a:t>・</a:t>
+                      </a:r>
+                      <a:r>
+                        <a:rPr lang="ja-JP" altLang="ja-JP" sz="2400" dirty="0"/>
+                        <a:t>Blenderで建物制作</a:t>
+                      </a:r>
+                      <a:endParaRPr lang="ja-JP" altLang="ja-JP" sz="2400" dirty="0">
+                        <a:solidFill>
+                          <a:schemeClr val="tx1"/>
+                        </a:solidFill>
+                      </a:endParaRPr>
+                    </a:p>
+                  </a:txBody>
+                  <a:tcPr/>
+                </a:tc>
+                <a:extLst>
+                  <a:ext uri="{0D108BD9-81ED-4DB2-BD59-A6C34878D82A}">
+                    <a16:rowId xmlns:a16="http://schemas.microsoft.com/office/drawing/2014/main" val="837655654"/>
+                  </a:ext>
+                </a:extLst>
+              </a:tr>
+              <a:tr h="2003828">
+                <a:tc>
+                  <a:txBody>
+                    <a:bodyPr/>
+                    <a:lstStyle/>
+                    <a:p>
+                      <a:pPr algn="ctr"/>
+                      <a:r>
+                        <a:rPr kumimoji="1" lang="en-US" altLang="ja-JP" sz="4400" dirty="0"/>
+                        <a:t>11</a:t>
+                      </a:r>
+                      <a:r>
+                        <a:rPr kumimoji="1" lang="ja-JP" altLang="en-US" sz="4400" dirty="0"/>
+                        <a:t>月</a:t>
+                      </a:r>
+                    </a:p>
+                  </a:txBody>
+                  <a:tcPr anchor="ctr"/>
+                </a:tc>
+                <a:tc>
+                  <a:txBody>
+                    <a:bodyPr/>
+                    <a:lstStyle/>
+                    <a:p>
+                      <a:pPr marL="0" marR="0" lvl="0" indent="0" algn="l" defTabSz="914400" rtl="0" eaLnBrk="1" fontAlgn="auto" latinLnBrk="0" hangingPunct="1">
+                        <a:lnSpc>
+                          <a:spcPct val="100000"/>
+                        </a:lnSpc>
+                        <a:spcBef>
+                          <a:spcPts val="0"/>
+                        </a:spcBef>
+                        <a:spcAft>
+                          <a:spcPts val="0"/>
+                        </a:spcAft>
+                        <a:buClr>
+                          <a:srgbClr val="000000"/>
+                        </a:buClr>
+                        <a:buSzTx/>
+                        <a:buFont typeface="Arial"/>
+                        <a:buNone/>
+                        <a:tabLst/>
+                        <a:defRPr/>
+                      </a:pPr>
+                      <a:r>
+                        <a:rPr lang="ja-JP" altLang="ja-JP" sz="2400" dirty="0"/>
+                        <a:t>3Dマップ</a:t>
+                      </a:r>
+                      <a:r>
+                        <a:rPr lang="ja-JP" altLang="ja-JP" sz="2400" b="1" dirty="0"/>
+                        <a:t>・修正</a:t>
+                      </a:r>
+                      <a:endParaRPr lang="en-US" altLang="ja-JP" sz="2400" b="1" dirty="0"/>
+                    </a:p>
+                    <a:p>
+                      <a:pPr marL="0" marR="0" lvl="0" indent="0" algn="l" defTabSz="914400" rtl="0" eaLnBrk="1" fontAlgn="auto" latinLnBrk="0" hangingPunct="1">
+                        <a:lnSpc>
+                          <a:spcPct val="100000"/>
+                        </a:lnSpc>
+                        <a:spcBef>
+                          <a:spcPts val="0"/>
+                        </a:spcBef>
+                        <a:spcAft>
+                          <a:spcPts val="0"/>
+                        </a:spcAft>
+                        <a:buClr>
+                          <a:srgbClr val="000000"/>
+                        </a:buClr>
+                        <a:buSzTx/>
+                        <a:buFont typeface="Arial"/>
+                        <a:buNone/>
+                        <a:tabLst/>
+                        <a:defRPr/>
+                      </a:pPr>
+                      <a:r>
+                        <a:rPr lang="ja-JP" altLang="en-US" sz="2400" dirty="0">
+                          <a:solidFill>
+                            <a:schemeClr val="tx1"/>
+                          </a:solidFill>
+                        </a:rPr>
+                        <a:t>・</a:t>
+                      </a:r>
+                      <a:r>
+                        <a:rPr lang="ja-JP" altLang="ja-JP" sz="2400" dirty="0"/>
+                        <a:t>Blenderで建物制作</a:t>
+                      </a:r>
+                      <a:endParaRPr lang="en-US" altLang="ja-JP" sz="2400" dirty="0"/>
+                    </a:p>
+                    <a:p>
+                      <a:pPr marL="0" marR="0" lvl="0" indent="0" algn="l" defTabSz="914400" rtl="0" eaLnBrk="1" fontAlgn="auto" latinLnBrk="0" hangingPunct="1">
+                        <a:lnSpc>
+                          <a:spcPct val="100000"/>
+                        </a:lnSpc>
+                        <a:spcBef>
+                          <a:spcPts val="0"/>
+                        </a:spcBef>
+                        <a:spcAft>
+                          <a:spcPts val="0"/>
+                        </a:spcAft>
+                        <a:buClr>
+                          <a:srgbClr val="000000"/>
+                        </a:buClr>
+                        <a:buSzTx/>
+                        <a:buFont typeface="Arial"/>
+                        <a:buNone/>
+                        <a:tabLst/>
+                        <a:defRPr/>
+                      </a:pPr>
+                      <a:r>
+                        <a:rPr lang="ja-JP" altLang="en-US" sz="2400" dirty="0">
+                          <a:solidFill>
+                            <a:schemeClr val="tx1"/>
+                          </a:solidFill>
+                        </a:rPr>
+                        <a:t>・</a:t>
+                      </a:r>
+                      <a:r>
+                        <a:rPr lang="ja-JP" altLang="ja-JP" sz="2400" dirty="0"/>
+                        <a:t>Three.jsへの組み込み</a:t>
+                      </a:r>
+                      <a:endParaRPr lang="en-US" altLang="ja-JP" sz="2400" dirty="0">
+                        <a:solidFill>
+                          <a:schemeClr val="tx1"/>
+                        </a:solidFill>
+                      </a:endParaRPr>
+                    </a:p>
+                    <a:p>
+                      <a:pPr marL="0" marR="0" lvl="0" indent="0" algn="l" defTabSz="914400" rtl="0" eaLnBrk="1" fontAlgn="auto" latinLnBrk="0" hangingPunct="1">
+                        <a:lnSpc>
+                          <a:spcPct val="100000"/>
+                        </a:lnSpc>
+                        <a:spcBef>
+                          <a:spcPts val="0"/>
+                        </a:spcBef>
+                        <a:spcAft>
+                          <a:spcPts val="0"/>
+                        </a:spcAft>
+                        <a:buClr>
+                          <a:srgbClr val="000000"/>
+                        </a:buClr>
+                        <a:buSzTx/>
+                        <a:buFont typeface="Arial"/>
+                        <a:buNone/>
+                        <a:tabLst/>
+                        <a:defRPr/>
+                      </a:pPr>
+                      <a:r>
+                        <a:rPr lang="ja-JP" altLang="ja-JP" sz="2400" dirty="0">
+                          <a:solidFill>
+                            <a:schemeClr val="tx1"/>
+                          </a:solidFill>
+                        </a:rPr>
+                        <a:t>・</a:t>
+                      </a:r>
+                      <a:r>
+                        <a:rPr lang="ja-JP" altLang="ja-JP" sz="2400" dirty="0"/>
+                        <a:t>デザイン・レイアウト調整</a:t>
+                      </a:r>
+                      <a:endParaRPr lang="en-US" altLang="ja-JP" sz="2400" dirty="0"/>
+                    </a:p>
+                    <a:p>
+                      <a:pPr marL="0" marR="0" lvl="0" indent="0" algn="l" defTabSz="914400" rtl="0" eaLnBrk="1" fontAlgn="auto" latinLnBrk="0" hangingPunct="1">
+                        <a:lnSpc>
+                          <a:spcPct val="100000"/>
+                        </a:lnSpc>
+                        <a:spcBef>
+                          <a:spcPts val="0"/>
+                        </a:spcBef>
+                        <a:spcAft>
+                          <a:spcPts val="0"/>
+                        </a:spcAft>
+                        <a:buClr>
+                          <a:srgbClr val="000000"/>
+                        </a:buClr>
+                        <a:buSzTx/>
+                        <a:buFont typeface="Arial"/>
+                        <a:buNone/>
+                        <a:tabLst/>
+                        <a:defRPr/>
+                      </a:pPr>
+                      <a:r>
+                        <a:rPr lang="ja-JP" altLang="ja-JP" sz="2400" dirty="0"/>
+                        <a:t>・Webサイト・3Dマップの動作確認</a:t>
+                      </a:r>
+                    </a:p>
+                  </a:txBody>
+                  <a:tcPr/>
+                </a:tc>
+                <a:extLst>
+                  <a:ext uri="{0D108BD9-81ED-4DB2-BD59-A6C34878D82A}">
+                    <a16:rowId xmlns:a16="http://schemas.microsoft.com/office/drawing/2014/main" val="3554428260"/>
+                  </a:ext>
+                </a:extLst>
+              </a:tr>
+              <a:tr h="1060850">
+                <a:tc>
+                  <a:txBody>
+                    <a:bodyPr/>
+                    <a:lstStyle/>
+                    <a:p>
+                      <a:pPr algn="ctr"/>
+                      <a:r>
+                        <a:rPr kumimoji="1" lang="en-US" altLang="ja-JP" sz="4400" dirty="0"/>
+                        <a:t>12</a:t>
+                      </a:r>
+                      <a:r>
+                        <a:rPr kumimoji="1" lang="ja-JP" altLang="en-US" sz="4400" dirty="0"/>
+                        <a:t>月</a:t>
+                      </a:r>
+                    </a:p>
+                  </a:txBody>
+                  <a:tcPr anchor="ctr"/>
+                </a:tc>
+                <a:tc>
+                  <a:txBody>
+                    <a:bodyPr/>
+                    <a:lstStyle/>
+                    <a:p>
+                      <a:pPr marL="0" marR="0" lvl="0" indent="0" algn="l" defTabSz="914400" rtl="0" eaLnBrk="1" fontAlgn="auto" latinLnBrk="0" hangingPunct="1">
+                        <a:lnSpc>
+                          <a:spcPct val="100000"/>
+                        </a:lnSpc>
+                        <a:spcBef>
+                          <a:spcPts val="0"/>
+                        </a:spcBef>
+                        <a:spcAft>
+                          <a:spcPts val="0"/>
+                        </a:spcAft>
+                        <a:buClr>
+                          <a:srgbClr val="000000"/>
+                        </a:buClr>
+                        <a:buSzTx/>
+                        <a:buFont typeface="Arial"/>
+                        <a:buNone/>
+                        <a:tabLst/>
+                        <a:defRPr/>
+                      </a:pPr>
+                      <a:r>
+                        <a:rPr lang="ja-JP" altLang="ja-JP" sz="2400" b="1" dirty="0"/>
+                        <a:t>最終調整・完成</a:t>
+                      </a:r>
+                      <a:endParaRPr lang="en-US" altLang="ja-JP" sz="2400" dirty="0"/>
+                    </a:p>
+                    <a:p>
+                      <a:pPr marL="0" marR="0" lvl="0" indent="0" algn="l" defTabSz="914400" rtl="0" eaLnBrk="1" fontAlgn="auto" latinLnBrk="0" hangingPunct="1">
+                        <a:lnSpc>
+                          <a:spcPct val="100000"/>
+                        </a:lnSpc>
+                        <a:spcBef>
+                          <a:spcPts val="0"/>
+                        </a:spcBef>
+                        <a:spcAft>
+                          <a:spcPts val="0"/>
+                        </a:spcAft>
+                        <a:buClr>
+                          <a:srgbClr val="000000"/>
+                        </a:buClr>
+                        <a:buSzTx/>
+                        <a:buFont typeface="Arial"/>
+                        <a:buNone/>
+                        <a:tabLst/>
+                        <a:defRPr/>
+                      </a:pPr>
+                      <a:r>
+                        <a:rPr lang="ja-JP" altLang="ja-JP" sz="2400" dirty="0"/>
+                        <a:t>・全体の仕上げ</a:t>
+                      </a:r>
+                      <a:r>
+                        <a:rPr lang="ja-JP" altLang="en-US" sz="2400" dirty="0"/>
+                        <a:t>、</a:t>
+                      </a:r>
+                      <a:r>
+                        <a:rPr lang="ja-JP" altLang="ja-JP" sz="2400" dirty="0"/>
+                        <a:t>最終確認</a:t>
+                      </a:r>
+                      <a:endParaRPr lang="en-US" altLang="ja-JP" sz="2400" dirty="0"/>
+                    </a:p>
+                    <a:p>
+                      <a:pPr marL="0" marR="0" lvl="0" indent="0" algn="l" defTabSz="914400" rtl="0" eaLnBrk="1" fontAlgn="auto" latinLnBrk="0" hangingPunct="1">
+                        <a:lnSpc>
+                          <a:spcPct val="100000"/>
+                        </a:lnSpc>
+                        <a:spcBef>
+                          <a:spcPts val="0"/>
+                        </a:spcBef>
+                        <a:spcAft>
+                          <a:spcPts val="0"/>
+                        </a:spcAft>
+                        <a:buClr>
+                          <a:srgbClr val="000000"/>
+                        </a:buClr>
+                        <a:buSzTx/>
+                        <a:buFont typeface="Arial"/>
+                        <a:buNone/>
+                        <a:tabLst/>
+                        <a:defRPr/>
+                      </a:pPr>
+                      <a:r>
+                        <a:rPr lang="ja-JP" altLang="en-US" sz="2400" dirty="0"/>
+                        <a:t>・</a:t>
+                      </a:r>
+                      <a:r>
+                        <a:rPr lang="ja-JP" altLang="ja-JP" sz="2400" dirty="0"/>
+                        <a:t>卒業制作完成</a:t>
+                      </a:r>
+                    </a:p>
+                  </a:txBody>
+                  <a:tcPr/>
+                </a:tc>
+                <a:extLst>
+                  <a:ext uri="{0D108BD9-81ED-4DB2-BD59-A6C34878D82A}">
+                    <a16:rowId xmlns:a16="http://schemas.microsoft.com/office/drawing/2014/main" val="775957766"/>
                   </a:ext>
                 </a:extLst>
               </a:tr>
